--- a/CKDSurveillance/PPT/Q808.pptx
+++ b/CKDSurveillance/PPT/Q808.pptx
@@ -138,8 +138,280 @@
         <c:grouping val="standard"/>
         <c:varyColors val="0"/>
         <c:ser>
+          <c:idx val="1"/>
+          <c:order val="0"/>
+          <c:tx>
+            <c:strRef>
+              <c:f>Anemia!$E$30</c:f>
+              <c:strCache>
+                <c:ptCount val="1"/>
+                <c:pt idx="0">
+                  <c:v>With CKD</c:v>
+                </c:pt>
+              </c:strCache>
+            </c:strRef>
+          </c:tx>
+          <c:spPr>
+            <a:ln w="44450" cap="rnd">
+              <a:solidFill>
+                <a:schemeClr val="accent2"/>
+              </a:solidFill>
+              <a:round/>
+            </a:ln>
+            <a:effectLst/>
+          </c:spPr>
+          <c:marker>
+            <c:symbol val="circle"/>
+            <c:size val="5"/>
+            <c:spPr>
+              <a:solidFill>
+                <a:schemeClr val="accent2"/>
+              </a:solidFill>
+              <a:ln w="9525">
+                <a:solidFill>
+                  <a:schemeClr val="accent2"/>
+                </a:solidFill>
+              </a:ln>
+              <a:effectLst/>
+            </c:spPr>
+          </c:marker>
+          <c:errBars>
+            <c:errDir val="y"/>
+            <c:errBarType val="both"/>
+            <c:errValType val="cust"/>
+            <c:noEndCap val="0"/>
+            <c:plus>
+              <c:numRef>
+                <c:f>Anemia!$J$14:$J$18</c:f>
+                <c:numCache>
+                  <c:formatCode>General</c:formatCode>
+                  <c:ptCount val="5"/>
+                  <c:pt idx="0">
+                    <c:v>5.0620100000000057E-3</c:v>
+                  </c:pt>
+                  <c:pt idx="1">
+                    <c:v>8.2490399999999992E-3</c:v>
+                  </c:pt>
+                  <c:pt idx="2">
+                    <c:v>9.9374900000000002E-3</c:v>
+                  </c:pt>
+                  <c:pt idx="3">
+                    <c:v>9.3730999999999953E-3</c:v>
+                  </c:pt>
+                  <c:pt idx="4">
+                    <c:v>9.5510100000000056E-3</c:v>
+                  </c:pt>
+                </c:numCache>
+              </c:numRef>
+            </c:plus>
+            <c:minus>
+              <c:numRef>
+                <c:f>Anemia!$K$14:$K$18</c:f>
+                <c:numCache>
+                  <c:formatCode>General</c:formatCode>
+                  <c:ptCount val="5"/>
+                  <c:pt idx="0">
+                    <c:v>5.0618899999999994E-3</c:v>
+                  </c:pt>
+                  <c:pt idx="1">
+                    <c:v>8.2491300000000004E-3</c:v>
+                  </c:pt>
+                  <c:pt idx="2">
+                    <c:v>9.9374299999999971E-3</c:v>
+                  </c:pt>
+                  <c:pt idx="3">
+                    <c:v>9.3736000000000028E-3</c:v>
+                  </c:pt>
+                  <c:pt idx="4">
+                    <c:v>9.5514900000000028E-3</c:v>
+                  </c:pt>
+                </c:numCache>
+              </c:numRef>
+            </c:minus>
+            <c:spPr>
+              <a:noFill/>
+              <a:ln w="9525" cap="flat" cmpd="sng" algn="ctr">
+                <a:solidFill>
+                  <a:schemeClr val="tx1">
+                    <a:lumMod val="65000"/>
+                    <a:lumOff val="35000"/>
+                  </a:schemeClr>
+                </a:solidFill>
+                <a:round/>
+              </a:ln>
+              <a:effectLst/>
+            </c:spPr>
+          </c:errBars>
+          <c:val>
+            <c:numRef>
+              <c:f>Anemia!$E$31:$E$35</c:f>
+              <c:numCache>
+                <c:formatCode>0.0%</c:formatCode>
+                <c:ptCount val="5"/>
+                <c:pt idx="0">
+                  <c:v>0.11706800000000001</c:v>
+                </c:pt>
+                <c:pt idx="1">
+                  <c:v>0.146706</c:v>
+                </c:pt>
+                <c:pt idx="2">
+                  <c:v>0.18376400000000001</c:v>
+                </c:pt>
+                <c:pt idx="3">
+                  <c:v>0.16214600000000001</c:v>
+                </c:pt>
+                <c:pt idx="4">
+                  <c:v>0.164128</c:v>
+                </c:pt>
+              </c:numCache>
+            </c:numRef>
+          </c:val>
+          <c:smooth val="0"/>
+          <c:extLst>
+            <c:ext xmlns:c16="http://schemas.microsoft.com/office/drawing/2014/chart" uri="{C3380CC4-5D6E-409C-BE32-E72D297353CC}">
+              <c16:uniqueId val="{00000001-A827-47AB-9AA1-496600E5877E}"/>
+            </c:ext>
+          </c:extLst>
+        </c:ser>
+        <c:ser>
+          <c:idx val="2"/>
+          <c:order val="1"/>
+          <c:tx>
+            <c:strRef>
+              <c:f>Anemia!$D$30</c:f>
+              <c:strCache>
+                <c:ptCount val="1"/>
+                <c:pt idx="0">
+                  <c:v>Without CKD</c:v>
+                </c:pt>
+              </c:strCache>
+            </c:strRef>
+          </c:tx>
+          <c:spPr>
+            <a:ln w="44450" cap="rnd">
+              <a:solidFill>
+                <a:schemeClr val="accent3"/>
+              </a:solidFill>
+              <a:round/>
+            </a:ln>
+            <a:effectLst/>
+          </c:spPr>
+          <c:marker>
+            <c:symbol val="circle"/>
+            <c:size val="5"/>
+            <c:spPr>
+              <a:solidFill>
+                <a:schemeClr val="accent3"/>
+              </a:solidFill>
+              <a:ln w="9525">
+                <a:solidFill>
+                  <a:schemeClr val="accent3"/>
+                </a:solidFill>
+              </a:ln>
+              <a:effectLst/>
+            </c:spPr>
+          </c:marker>
+          <c:errBars>
+            <c:errDir val="y"/>
+            <c:errBarType val="both"/>
+            <c:errValType val="cust"/>
+            <c:noEndCap val="0"/>
+            <c:plus>
+              <c:numRef>
+                <c:f>Anemia!$J$19:$J$23</c:f>
+                <c:numCache>
+                  <c:formatCode>General</c:formatCode>
+                  <c:ptCount val="5"/>
+                  <c:pt idx="0">
+                    <c:v>2.0078570000000004E-2</c:v>
+                  </c:pt>
+                  <c:pt idx="1">
+                    <c:v>2.5545540000000005E-2</c:v>
+                  </c:pt>
+                  <c:pt idx="2">
+                    <c:v>1.833236000000002E-2</c:v>
+                  </c:pt>
+                  <c:pt idx="3">
+                    <c:v>1.915086000000002E-2</c:v>
+                  </c:pt>
+                  <c:pt idx="4">
+                    <c:v>3.4396419999999983E-2</c:v>
+                  </c:pt>
+                </c:numCache>
+              </c:numRef>
+            </c:plus>
+            <c:minus>
+              <c:numRef>
+                <c:f>Anemia!$K$19:$K$23</c:f>
+                <c:numCache>
+                  <c:formatCode>General</c:formatCode>
+                  <c:ptCount val="5"/>
+                  <c:pt idx="0">
+                    <c:v>2.007798999999999E-2</c:v>
+                  </c:pt>
+                  <c:pt idx="1">
+                    <c:v>2.5546170000000007E-2</c:v>
+                  </c:pt>
+                  <c:pt idx="2">
+                    <c:v>1.8331429999999982E-2</c:v>
+                  </c:pt>
+                  <c:pt idx="3">
+                    <c:v>1.9150289999999986E-2</c:v>
+                  </c:pt>
+                  <c:pt idx="4">
+                    <c:v>3.4395840000000011E-2</c:v>
+                  </c:pt>
+                </c:numCache>
+              </c:numRef>
+            </c:minus>
+            <c:spPr>
+              <a:noFill/>
+              <a:ln w="9525" cap="flat" cmpd="sng" algn="ctr">
+                <a:solidFill>
+                  <a:schemeClr val="tx1">
+                    <a:lumMod val="65000"/>
+                    <a:lumOff val="35000"/>
+                  </a:schemeClr>
+                </a:solidFill>
+                <a:round/>
+              </a:ln>
+              <a:effectLst/>
+            </c:spPr>
+          </c:errBars>
+          <c:val>
+            <c:numRef>
+              <c:f>Anemia!$D$31:$D$35</c:f>
+              <c:numCache>
+                <c:formatCode>0.0%</c:formatCode>
+                <c:ptCount val="5"/>
+                <c:pt idx="0">
+                  <c:v>3.8219000000000003E-2</c:v>
+                </c:pt>
+                <c:pt idx="1">
+                  <c:v>4.4313999999999999E-2</c:v>
+                </c:pt>
+                <c:pt idx="2">
+                  <c:v>5.7673000000000002E-2</c:v>
+                </c:pt>
+                <c:pt idx="3">
+                  <c:v>6.1199999999999997E-2</c:v>
+                </c:pt>
+                <c:pt idx="4">
+                  <c:v>5.5849000000000003E-2</c:v>
+                </c:pt>
+              </c:numCache>
+            </c:numRef>
+          </c:val>
+          <c:smooth val="0"/>
+          <c:extLst>
+            <c:ext xmlns:c16="http://schemas.microsoft.com/office/drawing/2014/chart" uri="{C3380CC4-5D6E-409C-BE32-E72D297353CC}">
+              <c16:uniqueId val="{00000002-A827-47AB-9AA1-496600E5877E}"/>
+            </c:ext>
+          </c:extLst>
+        </c:ser>
+        <c:ser>
           <c:idx val="0"/>
-          <c:order val="0"/>
+          <c:order val="2"/>
           <c:tx>
             <c:strRef>
               <c:f>Anemia!$C$30</c:f>
@@ -294,278 +566,6 @@
           <c:extLst>
             <c:ext xmlns:c16="http://schemas.microsoft.com/office/drawing/2014/chart" uri="{C3380CC4-5D6E-409C-BE32-E72D297353CC}">
               <c16:uniqueId val="{00000000-A827-47AB-9AA1-496600E5877E}"/>
-            </c:ext>
-          </c:extLst>
-        </c:ser>
-        <c:ser>
-          <c:idx val="1"/>
-          <c:order val="1"/>
-          <c:tx>
-            <c:strRef>
-              <c:f>Anemia!$E$30</c:f>
-              <c:strCache>
-                <c:ptCount val="1"/>
-                <c:pt idx="0">
-                  <c:v>CKD</c:v>
-                </c:pt>
-              </c:strCache>
-            </c:strRef>
-          </c:tx>
-          <c:spPr>
-            <a:ln w="44450" cap="rnd">
-              <a:solidFill>
-                <a:schemeClr val="accent2"/>
-              </a:solidFill>
-              <a:round/>
-            </a:ln>
-            <a:effectLst/>
-          </c:spPr>
-          <c:marker>
-            <c:symbol val="circle"/>
-            <c:size val="5"/>
-            <c:spPr>
-              <a:solidFill>
-                <a:schemeClr val="accent2"/>
-              </a:solidFill>
-              <a:ln w="9525">
-                <a:solidFill>
-                  <a:schemeClr val="accent2"/>
-                </a:solidFill>
-              </a:ln>
-              <a:effectLst/>
-            </c:spPr>
-          </c:marker>
-          <c:errBars>
-            <c:errDir val="y"/>
-            <c:errBarType val="both"/>
-            <c:errValType val="cust"/>
-            <c:noEndCap val="0"/>
-            <c:plus>
-              <c:numRef>
-                <c:f>Anemia!$J$14:$J$18</c:f>
-                <c:numCache>
-                  <c:formatCode>General</c:formatCode>
-                  <c:ptCount val="5"/>
-                  <c:pt idx="0">
-                    <c:v>5.0620100000000057E-3</c:v>
-                  </c:pt>
-                  <c:pt idx="1">
-                    <c:v>8.2490399999999992E-3</c:v>
-                  </c:pt>
-                  <c:pt idx="2">
-                    <c:v>9.9374900000000002E-3</c:v>
-                  </c:pt>
-                  <c:pt idx="3">
-                    <c:v>9.3730999999999953E-3</c:v>
-                  </c:pt>
-                  <c:pt idx="4">
-                    <c:v>9.5510100000000056E-3</c:v>
-                  </c:pt>
-                </c:numCache>
-              </c:numRef>
-            </c:plus>
-            <c:minus>
-              <c:numRef>
-                <c:f>Anemia!$K$14:$K$18</c:f>
-                <c:numCache>
-                  <c:formatCode>General</c:formatCode>
-                  <c:ptCount val="5"/>
-                  <c:pt idx="0">
-                    <c:v>5.0618899999999994E-3</c:v>
-                  </c:pt>
-                  <c:pt idx="1">
-                    <c:v>8.2491300000000004E-3</c:v>
-                  </c:pt>
-                  <c:pt idx="2">
-                    <c:v>9.9374299999999971E-3</c:v>
-                  </c:pt>
-                  <c:pt idx="3">
-                    <c:v>9.3736000000000028E-3</c:v>
-                  </c:pt>
-                  <c:pt idx="4">
-                    <c:v>9.5514900000000028E-3</c:v>
-                  </c:pt>
-                </c:numCache>
-              </c:numRef>
-            </c:minus>
-            <c:spPr>
-              <a:noFill/>
-              <a:ln w="9525" cap="flat" cmpd="sng" algn="ctr">
-                <a:solidFill>
-                  <a:schemeClr val="tx1">
-                    <a:lumMod val="65000"/>
-                    <a:lumOff val="35000"/>
-                  </a:schemeClr>
-                </a:solidFill>
-                <a:round/>
-              </a:ln>
-              <a:effectLst/>
-            </c:spPr>
-          </c:errBars>
-          <c:val>
-            <c:numRef>
-              <c:f>Anemia!$E$31:$E$35</c:f>
-              <c:numCache>
-                <c:formatCode>0.0%</c:formatCode>
-                <c:ptCount val="5"/>
-                <c:pt idx="0">
-                  <c:v>0.11706800000000001</c:v>
-                </c:pt>
-                <c:pt idx="1">
-                  <c:v>0.146706</c:v>
-                </c:pt>
-                <c:pt idx="2">
-                  <c:v>0.18376400000000001</c:v>
-                </c:pt>
-                <c:pt idx="3">
-                  <c:v>0.16214600000000001</c:v>
-                </c:pt>
-                <c:pt idx="4">
-                  <c:v>0.164128</c:v>
-                </c:pt>
-              </c:numCache>
-            </c:numRef>
-          </c:val>
-          <c:smooth val="0"/>
-          <c:extLst>
-            <c:ext xmlns:c16="http://schemas.microsoft.com/office/drawing/2014/chart" uri="{C3380CC4-5D6E-409C-BE32-E72D297353CC}">
-              <c16:uniqueId val="{00000001-A827-47AB-9AA1-496600E5877E}"/>
-            </c:ext>
-          </c:extLst>
-        </c:ser>
-        <c:ser>
-          <c:idx val="2"/>
-          <c:order val="2"/>
-          <c:tx>
-            <c:strRef>
-              <c:f>Anemia!$D$30</c:f>
-              <c:strCache>
-                <c:ptCount val="1"/>
-                <c:pt idx="0">
-                  <c:v>No CKD</c:v>
-                </c:pt>
-              </c:strCache>
-            </c:strRef>
-          </c:tx>
-          <c:spPr>
-            <a:ln w="44450" cap="rnd">
-              <a:solidFill>
-                <a:schemeClr val="accent3"/>
-              </a:solidFill>
-              <a:round/>
-            </a:ln>
-            <a:effectLst/>
-          </c:spPr>
-          <c:marker>
-            <c:symbol val="circle"/>
-            <c:size val="5"/>
-            <c:spPr>
-              <a:solidFill>
-                <a:schemeClr val="accent3"/>
-              </a:solidFill>
-              <a:ln w="9525">
-                <a:solidFill>
-                  <a:schemeClr val="accent3"/>
-                </a:solidFill>
-              </a:ln>
-              <a:effectLst/>
-            </c:spPr>
-          </c:marker>
-          <c:errBars>
-            <c:errDir val="y"/>
-            <c:errBarType val="both"/>
-            <c:errValType val="cust"/>
-            <c:noEndCap val="0"/>
-            <c:plus>
-              <c:numRef>
-                <c:f>Anemia!$J$19:$J$23</c:f>
-                <c:numCache>
-                  <c:formatCode>General</c:formatCode>
-                  <c:ptCount val="5"/>
-                  <c:pt idx="0">
-                    <c:v>2.0078570000000004E-2</c:v>
-                  </c:pt>
-                  <c:pt idx="1">
-                    <c:v>2.5545540000000005E-2</c:v>
-                  </c:pt>
-                  <c:pt idx="2">
-                    <c:v>1.833236000000002E-2</c:v>
-                  </c:pt>
-                  <c:pt idx="3">
-                    <c:v>1.915086000000002E-2</c:v>
-                  </c:pt>
-                  <c:pt idx="4">
-                    <c:v>3.4396419999999983E-2</c:v>
-                  </c:pt>
-                </c:numCache>
-              </c:numRef>
-            </c:plus>
-            <c:minus>
-              <c:numRef>
-                <c:f>Anemia!$K$19:$K$23</c:f>
-                <c:numCache>
-                  <c:formatCode>General</c:formatCode>
-                  <c:ptCount val="5"/>
-                  <c:pt idx="0">
-                    <c:v>2.007798999999999E-2</c:v>
-                  </c:pt>
-                  <c:pt idx="1">
-                    <c:v>2.5546170000000007E-2</c:v>
-                  </c:pt>
-                  <c:pt idx="2">
-                    <c:v>1.8331429999999982E-2</c:v>
-                  </c:pt>
-                  <c:pt idx="3">
-                    <c:v>1.9150289999999986E-2</c:v>
-                  </c:pt>
-                  <c:pt idx="4">
-                    <c:v>3.4395840000000011E-2</c:v>
-                  </c:pt>
-                </c:numCache>
-              </c:numRef>
-            </c:minus>
-            <c:spPr>
-              <a:noFill/>
-              <a:ln w="9525" cap="flat" cmpd="sng" algn="ctr">
-                <a:solidFill>
-                  <a:schemeClr val="tx1">
-                    <a:lumMod val="65000"/>
-                    <a:lumOff val="35000"/>
-                  </a:schemeClr>
-                </a:solidFill>
-                <a:round/>
-              </a:ln>
-              <a:effectLst/>
-            </c:spPr>
-          </c:errBars>
-          <c:val>
-            <c:numRef>
-              <c:f>Anemia!$D$31:$D$35</c:f>
-              <c:numCache>
-                <c:formatCode>0.0%</c:formatCode>
-                <c:ptCount val="5"/>
-                <c:pt idx="0">
-                  <c:v>3.8219000000000003E-2</c:v>
-                </c:pt>
-                <c:pt idx="1">
-                  <c:v>4.4313999999999999E-2</c:v>
-                </c:pt>
-                <c:pt idx="2">
-                  <c:v>5.7673000000000002E-2</c:v>
-                </c:pt>
-                <c:pt idx="3">
-                  <c:v>6.1199999999999997E-2</c:v>
-                </c:pt>
-                <c:pt idx="4">
-                  <c:v>5.5849000000000003E-2</c:v>
-                </c:pt>
-              </c:numCache>
-            </c:numRef>
-          </c:val>
-          <c:smooth val="0"/>
-          <c:extLst>
-            <c:ext xmlns:c16="http://schemas.microsoft.com/office/drawing/2014/chart" uri="{C3380CC4-5D6E-409C-BE32-E72D297353CC}">
-              <c16:uniqueId val="{00000002-A827-47AB-9AA1-496600E5877E}"/>
             </c:ext>
           </c:extLst>
         </c:ser>
@@ -669,8 +669,8 @@
                   </a:defRPr>
                 </a:pPr>
                 <a:r>
-                  <a:rPr lang="en-US"/>
-                  <a:t>% Anemia</a:t>
+                  <a:rPr lang="en-US" dirty="0"/>
+                  <a:t>Anemia (%)</a:t>
                 </a:r>
               </a:p>
             </c:rich>
@@ -828,8 +828,280 @@
         <c:grouping val="standard"/>
         <c:varyColors val="0"/>
         <c:ser>
+          <c:idx val="1"/>
+          <c:order val="0"/>
+          <c:tx>
+            <c:strRef>
+              <c:f>'Anemia (Age Std)'!$E$30</c:f>
+              <c:strCache>
+                <c:ptCount val="1"/>
+                <c:pt idx="0">
+                  <c:v>With CKD</c:v>
+                </c:pt>
+              </c:strCache>
+            </c:strRef>
+          </c:tx>
+          <c:spPr>
+            <a:ln w="44450" cap="rnd">
+              <a:solidFill>
+                <a:schemeClr val="accent2"/>
+              </a:solidFill>
+              <a:round/>
+            </a:ln>
+            <a:effectLst/>
+          </c:spPr>
+          <c:marker>
+            <c:symbol val="circle"/>
+            <c:size val="5"/>
+            <c:spPr>
+              <a:solidFill>
+                <a:schemeClr val="accent2"/>
+              </a:solidFill>
+              <a:ln w="9525">
+                <a:solidFill>
+                  <a:schemeClr val="accent2"/>
+                </a:solidFill>
+              </a:ln>
+              <a:effectLst/>
+            </c:spPr>
+          </c:marker>
+          <c:errBars>
+            <c:errDir val="y"/>
+            <c:errBarType val="both"/>
+            <c:errValType val="cust"/>
+            <c:noEndCap val="0"/>
+            <c:plus>
+              <c:numRef>
+                <c:f>'Anemia (Age Std)'!$J$14:$J$18</c:f>
+                <c:numCache>
+                  <c:formatCode>General</c:formatCode>
+                  <c:ptCount val="5"/>
+                  <c:pt idx="0">
+                    <c:v>5.4679300000000028E-3</c:v>
+                  </c:pt>
+                  <c:pt idx="1">
+                    <c:v>9.2311300000000041E-3</c:v>
+                  </c:pt>
+                  <c:pt idx="2">
+                    <c:v>1.062929E-2</c:v>
+                  </c:pt>
+                  <c:pt idx="3">
+                    <c:v>1.0093150000000002E-2</c:v>
+                  </c:pt>
+                  <c:pt idx="4">
+                    <c:v>1.0042639999999999E-2</c:v>
+                  </c:pt>
+                </c:numCache>
+              </c:numRef>
+            </c:plus>
+            <c:minus>
+              <c:numRef>
+                <c:f>'Anemia (Age Std)'!$K$14:$K$18</c:f>
+                <c:numCache>
+                  <c:formatCode>General</c:formatCode>
+                  <c:ptCount val="5"/>
+                  <c:pt idx="0">
+                    <c:v>5.4671199999999989E-3</c:v>
+                  </c:pt>
+                  <c:pt idx="1">
+                    <c:v>9.2302199999999973E-3</c:v>
+                  </c:pt>
+                  <c:pt idx="2">
+                    <c:v>1.0629240000000005E-2</c:v>
+                  </c:pt>
+                  <c:pt idx="3">
+                    <c:v>1.0093599999999994E-2</c:v>
+                  </c:pt>
+                  <c:pt idx="4">
+                    <c:v>1.00424E-2</c:v>
+                  </c:pt>
+                </c:numCache>
+              </c:numRef>
+            </c:minus>
+            <c:spPr>
+              <a:noFill/>
+              <a:ln w="9525" cap="flat" cmpd="sng" algn="ctr">
+                <a:solidFill>
+                  <a:schemeClr val="tx1">
+                    <a:lumMod val="65000"/>
+                    <a:lumOff val="35000"/>
+                  </a:schemeClr>
+                </a:solidFill>
+                <a:round/>
+              </a:ln>
+              <a:effectLst/>
+            </c:spPr>
+          </c:errBars>
+          <c:val>
+            <c:numRef>
+              <c:f>'Anemia (Age Std)'!$E$31:$E$35</c:f>
+              <c:numCache>
+                <c:formatCode>0.0%</c:formatCode>
+                <c:ptCount val="5"/>
+                <c:pt idx="0">
+                  <c:v>9.2766000000000001E-2</c:v>
+                </c:pt>
+                <c:pt idx="1">
+                  <c:v>0.106687</c:v>
+                </c:pt>
+                <c:pt idx="2">
+                  <c:v>0.14028299999999999</c:v>
+                </c:pt>
+                <c:pt idx="3">
+                  <c:v>0.135847</c:v>
+                </c:pt>
+                <c:pt idx="4">
+                  <c:v>0.13555500000000001</c:v>
+                </c:pt>
+              </c:numCache>
+            </c:numRef>
+          </c:val>
+          <c:smooth val="0"/>
+          <c:extLst>
+            <c:ext xmlns:c16="http://schemas.microsoft.com/office/drawing/2014/chart" uri="{C3380CC4-5D6E-409C-BE32-E72D297353CC}">
+              <c16:uniqueId val="{00000001-646C-4DB5-B558-CF504514FFD4}"/>
+            </c:ext>
+          </c:extLst>
+        </c:ser>
+        <c:ser>
+          <c:idx val="2"/>
+          <c:order val="1"/>
+          <c:tx>
+            <c:strRef>
+              <c:f>'Anemia (Age Std)'!$D$30</c:f>
+              <c:strCache>
+                <c:ptCount val="1"/>
+                <c:pt idx="0">
+                  <c:v>Without CKD</c:v>
+                </c:pt>
+              </c:strCache>
+            </c:strRef>
+          </c:tx>
+          <c:spPr>
+            <a:ln w="44450" cap="rnd">
+              <a:solidFill>
+                <a:schemeClr val="accent3"/>
+              </a:solidFill>
+              <a:round/>
+            </a:ln>
+            <a:effectLst/>
+          </c:spPr>
+          <c:marker>
+            <c:symbol val="circle"/>
+            <c:size val="5"/>
+            <c:spPr>
+              <a:solidFill>
+                <a:schemeClr val="accent3"/>
+              </a:solidFill>
+              <a:ln w="9525">
+                <a:solidFill>
+                  <a:schemeClr val="accent3"/>
+                </a:solidFill>
+              </a:ln>
+              <a:effectLst/>
+            </c:spPr>
+          </c:marker>
+          <c:errBars>
+            <c:errDir val="y"/>
+            <c:errBarType val="both"/>
+            <c:errValType val="cust"/>
+            <c:noEndCap val="0"/>
+            <c:plus>
+              <c:numRef>
+                <c:f>'Anemia (Age Std)'!$J$19:$J$23</c:f>
+                <c:numCache>
+                  <c:formatCode>General</c:formatCode>
+                  <c:ptCount val="5"/>
+                  <c:pt idx="0">
+                    <c:v>1.9644439999999999E-2</c:v>
+                  </c:pt>
+                  <c:pt idx="1">
+                    <c:v>2.1054400000000001E-2</c:v>
+                  </c:pt>
+                  <c:pt idx="2">
+                    <c:v>1.8506159999999994E-2</c:v>
+                  </c:pt>
+                  <c:pt idx="3">
+                    <c:v>2.4026469999999994E-2</c:v>
+                  </c:pt>
+                  <c:pt idx="4">
+                    <c:v>2.9040390000000013E-2</c:v>
+                  </c:pt>
+                </c:numCache>
+              </c:numRef>
+            </c:plus>
+            <c:minus>
+              <c:numRef>
+                <c:f>'Anemia (Age Std)'!$K$19:$K$23</c:f>
+                <c:numCache>
+                  <c:formatCode>General</c:formatCode>
+                  <c:ptCount val="5"/>
+                  <c:pt idx="0">
+                    <c:v>1.9644869999999995E-2</c:v>
+                  </c:pt>
+                  <c:pt idx="1">
+                    <c:v>2.1053849999999985E-2</c:v>
+                  </c:pt>
+                  <c:pt idx="2">
+                    <c:v>1.8506270000000019E-2</c:v>
+                  </c:pt>
+                  <c:pt idx="3">
+                    <c:v>2.4026860000000011E-2</c:v>
+                  </c:pt>
+                  <c:pt idx="4">
+                    <c:v>2.903944E-2</c:v>
+                  </c:pt>
+                </c:numCache>
+              </c:numRef>
+            </c:minus>
+            <c:spPr>
+              <a:noFill/>
+              <a:ln w="9525" cap="flat" cmpd="sng" algn="ctr">
+                <a:solidFill>
+                  <a:schemeClr val="tx1">
+                    <a:lumMod val="65000"/>
+                    <a:lumOff val="35000"/>
+                  </a:schemeClr>
+                </a:solidFill>
+                <a:round/>
+              </a:ln>
+              <a:effectLst/>
+            </c:spPr>
+          </c:errBars>
+          <c:val>
+            <c:numRef>
+              <c:f>'Anemia (Age Std)'!$D$31:$D$35</c:f>
+              <c:numCache>
+                <c:formatCode>0.0%</c:formatCode>
+                <c:ptCount val="5"/>
+                <c:pt idx="0">
+                  <c:v>3.9959000000000001E-2</c:v>
+                </c:pt>
+                <c:pt idx="1">
+                  <c:v>4.6656000000000003E-2</c:v>
+                </c:pt>
+                <c:pt idx="2">
+                  <c:v>6.0011000000000002E-2</c:v>
+                </c:pt>
+                <c:pt idx="3">
+                  <c:v>6.3045000000000004E-2</c:v>
+                </c:pt>
+                <c:pt idx="4">
+                  <c:v>5.6260999999999999E-2</c:v>
+                </c:pt>
+              </c:numCache>
+            </c:numRef>
+          </c:val>
+          <c:smooth val="0"/>
+          <c:extLst>
+            <c:ext xmlns:c16="http://schemas.microsoft.com/office/drawing/2014/chart" uri="{C3380CC4-5D6E-409C-BE32-E72D297353CC}">
+              <c16:uniqueId val="{00000002-646C-4DB5-B558-CF504514FFD4}"/>
+            </c:ext>
+          </c:extLst>
+        </c:ser>
+        <c:ser>
           <c:idx val="0"/>
-          <c:order val="0"/>
+          <c:order val="2"/>
           <c:tx>
             <c:strRef>
               <c:f>'Anemia (Age Std)'!$C$30</c:f>
@@ -984,278 +1256,6 @@
           <c:extLst>
             <c:ext xmlns:c16="http://schemas.microsoft.com/office/drawing/2014/chart" uri="{C3380CC4-5D6E-409C-BE32-E72D297353CC}">
               <c16:uniqueId val="{00000000-646C-4DB5-B558-CF504514FFD4}"/>
-            </c:ext>
-          </c:extLst>
-        </c:ser>
-        <c:ser>
-          <c:idx val="1"/>
-          <c:order val="1"/>
-          <c:tx>
-            <c:strRef>
-              <c:f>'Anemia (Age Std)'!$E$30</c:f>
-              <c:strCache>
-                <c:ptCount val="1"/>
-                <c:pt idx="0">
-                  <c:v>CKD</c:v>
-                </c:pt>
-              </c:strCache>
-            </c:strRef>
-          </c:tx>
-          <c:spPr>
-            <a:ln w="44450" cap="rnd">
-              <a:solidFill>
-                <a:schemeClr val="accent2"/>
-              </a:solidFill>
-              <a:round/>
-            </a:ln>
-            <a:effectLst/>
-          </c:spPr>
-          <c:marker>
-            <c:symbol val="circle"/>
-            <c:size val="5"/>
-            <c:spPr>
-              <a:solidFill>
-                <a:schemeClr val="accent2"/>
-              </a:solidFill>
-              <a:ln w="9525">
-                <a:solidFill>
-                  <a:schemeClr val="accent2"/>
-                </a:solidFill>
-              </a:ln>
-              <a:effectLst/>
-            </c:spPr>
-          </c:marker>
-          <c:errBars>
-            <c:errDir val="y"/>
-            <c:errBarType val="both"/>
-            <c:errValType val="cust"/>
-            <c:noEndCap val="0"/>
-            <c:plus>
-              <c:numRef>
-                <c:f>'Anemia (Age Std)'!$J$14:$J$18</c:f>
-                <c:numCache>
-                  <c:formatCode>General</c:formatCode>
-                  <c:ptCount val="5"/>
-                  <c:pt idx="0">
-                    <c:v>5.4679300000000028E-3</c:v>
-                  </c:pt>
-                  <c:pt idx="1">
-                    <c:v>9.2311300000000041E-3</c:v>
-                  </c:pt>
-                  <c:pt idx="2">
-                    <c:v>1.062929E-2</c:v>
-                  </c:pt>
-                  <c:pt idx="3">
-                    <c:v>1.0093150000000002E-2</c:v>
-                  </c:pt>
-                  <c:pt idx="4">
-                    <c:v>1.0042639999999999E-2</c:v>
-                  </c:pt>
-                </c:numCache>
-              </c:numRef>
-            </c:plus>
-            <c:minus>
-              <c:numRef>
-                <c:f>'Anemia (Age Std)'!$K$14:$K$18</c:f>
-                <c:numCache>
-                  <c:formatCode>General</c:formatCode>
-                  <c:ptCount val="5"/>
-                  <c:pt idx="0">
-                    <c:v>5.4671199999999989E-3</c:v>
-                  </c:pt>
-                  <c:pt idx="1">
-                    <c:v>9.2302199999999973E-3</c:v>
-                  </c:pt>
-                  <c:pt idx="2">
-                    <c:v>1.0629240000000005E-2</c:v>
-                  </c:pt>
-                  <c:pt idx="3">
-                    <c:v>1.0093599999999994E-2</c:v>
-                  </c:pt>
-                  <c:pt idx="4">
-                    <c:v>1.00424E-2</c:v>
-                  </c:pt>
-                </c:numCache>
-              </c:numRef>
-            </c:minus>
-            <c:spPr>
-              <a:noFill/>
-              <a:ln w="9525" cap="flat" cmpd="sng" algn="ctr">
-                <a:solidFill>
-                  <a:schemeClr val="tx1">
-                    <a:lumMod val="65000"/>
-                    <a:lumOff val="35000"/>
-                  </a:schemeClr>
-                </a:solidFill>
-                <a:round/>
-              </a:ln>
-              <a:effectLst/>
-            </c:spPr>
-          </c:errBars>
-          <c:val>
-            <c:numRef>
-              <c:f>'Anemia (Age Std)'!$E$31:$E$35</c:f>
-              <c:numCache>
-                <c:formatCode>0.0%</c:formatCode>
-                <c:ptCount val="5"/>
-                <c:pt idx="0">
-                  <c:v>9.2766000000000001E-2</c:v>
-                </c:pt>
-                <c:pt idx="1">
-                  <c:v>0.106687</c:v>
-                </c:pt>
-                <c:pt idx="2">
-                  <c:v>0.14028299999999999</c:v>
-                </c:pt>
-                <c:pt idx="3">
-                  <c:v>0.135847</c:v>
-                </c:pt>
-                <c:pt idx="4">
-                  <c:v>0.13555500000000001</c:v>
-                </c:pt>
-              </c:numCache>
-            </c:numRef>
-          </c:val>
-          <c:smooth val="0"/>
-          <c:extLst>
-            <c:ext xmlns:c16="http://schemas.microsoft.com/office/drawing/2014/chart" uri="{C3380CC4-5D6E-409C-BE32-E72D297353CC}">
-              <c16:uniqueId val="{00000001-646C-4DB5-B558-CF504514FFD4}"/>
-            </c:ext>
-          </c:extLst>
-        </c:ser>
-        <c:ser>
-          <c:idx val="2"/>
-          <c:order val="2"/>
-          <c:tx>
-            <c:strRef>
-              <c:f>'Anemia (Age Std)'!$D$30</c:f>
-              <c:strCache>
-                <c:ptCount val="1"/>
-                <c:pt idx="0">
-                  <c:v>No CKD</c:v>
-                </c:pt>
-              </c:strCache>
-            </c:strRef>
-          </c:tx>
-          <c:spPr>
-            <a:ln w="44450" cap="rnd">
-              <a:solidFill>
-                <a:schemeClr val="accent3"/>
-              </a:solidFill>
-              <a:round/>
-            </a:ln>
-            <a:effectLst/>
-          </c:spPr>
-          <c:marker>
-            <c:symbol val="circle"/>
-            <c:size val="5"/>
-            <c:spPr>
-              <a:solidFill>
-                <a:schemeClr val="accent3"/>
-              </a:solidFill>
-              <a:ln w="9525">
-                <a:solidFill>
-                  <a:schemeClr val="accent3"/>
-                </a:solidFill>
-              </a:ln>
-              <a:effectLst/>
-            </c:spPr>
-          </c:marker>
-          <c:errBars>
-            <c:errDir val="y"/>
-            <c:errBarType val="both"/>
-            <c:errValType val="cust"/>
-            <c:noEndCap val="0"/>
-            <c:plus>
-              <c:numRef>
-                <c:f>'Anemia (Age Std)'!$J$19:$J$23</c:f>
-                <c:numCache>
-                  <c:formatCode>General</c:formatCode>
-                  <c:ptCount val="5"/>
-                  <c:pt idx="0">
-                    <c:v>1.9644439999999999E-2</c:v>
-                  </c:pt>
-                  <c:pt idx="1">
-                    <c:v>2.1054400000000001E-2</c:v>
-                  </c:pt>
-                  <c:pt idx="2">
-                    <c:v>1.8506159999999994E-2</c:v>
-                  </c:pt>
-                  <c:pt idx="3">
-                    <c:v>2.4026469999999994E-2</c:v>
-                  </c:pt>
-                  <c:pt idx="4">
-                    <c:v>2.9040390000000013E-2</c:v>
-                  </c:pt>
-                </c:numCache>
-              </c:numRef>
-            </c:plus>
-            <c:minus>
-              <c:numRef>
-                <c:f>'Anemia (Age Std)'!$K$19:$K$23</c:f>
-                <c:numCache>
-                  <c:formatCode>General</c:formatCode>
-                  <c:ptCount val="5"/>
-                  <c:pt idx="0">
-                    <c:v>1.9644869999999995E-2</c:v>
-                  </c:pt>
-                  <c:pt idx="1">
-                    <c:v>2.1053849999999985E-2</c:v>
-                  </c:pt>
-                  <c:pt idx="2">
-                    <c:v>1.8506270000000019E-2</c:v>
-                  </c:pt>
-                  <c:pt idx="3">
-                    <c:v>2.4026860000000011E-2</c:v>
-                  </c:pt>
-                  <c:pt idx="4">
-                    <c:v>2.903944E-2</c:v>
-                  </c:pt>
-                </c:numCache>
-              </c:numRef>
-            </c:minus>
-            <c:spPr>
-              <a:noFill/>
-              <a:ln w="9525" cap="flat" cmpd="sng" algn="ctr">
-                <a:solidFill>
-                  <a:schemeClr val="tx1">
-                    <a:lumMod val="65000"/>
-                    <a:lumOff val="35000"/>
-                  </a:schemeClr>
-                </a:solidFill>
-                <a:round/>
-              </a:ln>
-              <a:effectLst/>
-            </c:spPr>
-          </c:errBars>
-          <c:val>
-            <c:numRef>
-              <c:f>'Anemia (Age Std)'!$D$31:$D$35</c:f>
-              <c:numCache>
-                <c:formatCode>0.0%</c:formatCode>
-                <c:ptCount val="5"/>
-                <c:pt idx="0">
-                  <c:v>3.9959000000000001E-2</c:v>
-                </c:pt>
-                <c:pt idx="1">
-                  <c:v>4.6656000000000003E-2</c:v>
-                </c:pt>
-                <c:pt idx="2">
-                  <c:v>6.0011000000000002E-2</c:v>
-                </c:pt>
-                <c:pt idx="3">
-                  <c:v>6.3045000000000004E-2</c:v>
-                </c:pt>
-                <c:pt idx="4">
-                  <c:v>5.6260999999999999E-2</c:v>
-                </c:pt>
-              </c:numCache>
-            </c:numRef>
-          </c:val>
-          <c:smooth val="0"/>
-          <c:extLst>
-            <c:ext xmlns:c16="http://schemas.microsoft.com/office/drawing/2014/chart" uri="{C3380CC4-5D6E-409C-BE32-E72D297353CC}">
-              <c16:uniqueId val="{00000002-646C-4DB5-B558-CF504514FFD4}"/>
             </c:ext>
           </c:extLst>
         </c:ser>
@@ -1359,9 +1359,14 @@
                   </a:defRPr>
                 </a:pPr>
                 <a:r>
-                  <a:rPr lang="en-US"/>
-                  <a:t>% Anemia</a:t>
+                  <a:rPr lang="en-US" dirty="0"/>
+                  <a:t>Anemia</a:t>
                 </a:r>
+                <a:r>
+                  <a:rPr lang="en-US" baseline="0" dirty="0"/>
+                  <a:t> (%)</a:t>
+                </a:r>
+                <a:endParaRPr lang="en-US" dirty="0"/>
               </a:p>
             </c:rich>
           </c:tx>
@@ -1526,7 +1531,7 @@
               <c:strCache>
                 <c:ptCount val="1"/>
                 <c:pt idx="0">
-                  <c:v>18 to 39 years</c:v>
+                  <c:v>18-39 years</c:v>
                 </c:pt>
               </c:strCache>
             </c:strRef>
@@ -1685,7 +1690,7 @@
               <c:strCache>
                 <c:ptCount val="1"/>
                 <c:pt idx="0">
-                  <c:v>40 to 59 years</c:v>
+                  <c:v>40-59 years</c:v>
                 </c:pt>
               </c:strCache>
             </c:strRef>
@@ -1844,7 +1849,7 @@
               <c:strCache>
                 <c:ptCount val="1"/>
                 <c:pt idx="0">
-                  <c:v>60 to 69 years</c:v>
+                  <c:v>60-69 years</c:v>
                 </c:pt>
               </c:strCache>
             </c:strRef>
@@ -2243,7 +2248,7 @@
               <a:lstStyle/>
               <a:p>
                 <a:pPr>
-                  <a:defRPr sz="2400" b="0" i="0" u="none" strike="noStrike" kern="1200" baseline="0">
+                  <a:defRPr sz="2000" b="0" i="0" u="none" strike="noStrike" kern="1200" baseline="0">
                     <a:solidFill>
                       <a:schemeClr val="tx1"/>
                     </a:solidFill>
@@ -2253,8 +2258,16 @@
                   </a:defRPr>
                 </a:pPr>
                 <a:r>
-                  <a:rPr lang="en-US"/>
-                  <a:t>% Anemia</a:t>
+                  <a:rPr lang="en-US" sz="2000" dirty="0"/>
+                  <a:t>Anemia among</a:t>
+                </a:r>
+                <a:r>
+                  <a:rPr lang="en-US" sz="2000" baseline="0" dirty="0"/>
+                  <a:t> adults with CKD  (%)</a:t>
+                </a:r>
+                <a:r>
+                  <a:rPr lang="en-US" sz="2000" dirty="0"/>
+                  <a:t> </a:t>
                 </a:r>
               </a:p>
             </c:rich>
@@ -2272,7 +2285,7 @@
             <a:lstStyle/>
             <a:p>
               <a:pPr>
-                <a:defRPr sz="2400" b="0" i="0" u="none" strike="noStrike" kern="1200" baseline="0">
+                <a:defRPr sz="2000" b="0" i="0" u="none" strike="noStrike" kern="1200" baseline="0">
                   <a:solidFill>
                     <a:schemeClr val="tx1"/>
                   </a:solidFill>
@@ -2829,9 +2842,14 @@
                   </a:defRPr>
                 </a:pPr>
                 <a:r>
-                  <a:rPr lang="en-US"/>
-                  <a:t>% Anemia</a:t>
+                  <a:rPr lang="en-US" sz="2000" b="0" i="0" baseline="0" dirty="0">
+                    <a:effectLst/>
+                  </a:rPr>
+                  <a:t>Anemia among adults with CKD  (%) </a:t>
                 </a:r>
+                <a:endParaRPr lang="en-US" sz="2800" dirty="0">
+                  <a:effectLst/>
+                </a:endParaRPr>
               </a:p>
             </c:rich>
           </c:tx>
@@ -2988,8 +3006,326 @@
         <c:grouping val="standard"/>
         <c:varyColors val="0"/>
         <c:ser>
+          <c:idx val="3"/>
+          <c:order val="0"/>
+          <c:tx>
+            <c:strRef>
+              <c:f>'Race Ethnicity'!$K$105</c:f>
+              <c:strCache>
+                <c:ptCount val="1"/>
+                <c:pt idx="0">
+                  <c:v>Non-Hispanic White</c:v>
+                </c:pt>
+              </c:strCache>
+            </c:strRef>
+          </c:tx>
+          <c:spPr>
+            <a:ln w="44450" cap="rnd">
+              <a:solidFill>
+                <a:schemeClr val="accent4"/>
+              </a:solidFill>
+              <a:round/>
+            </a:ln>
+            <a:effectLst/>
+          </c:spPr>
+          <c:marker>
+            <c:symbol val="circle"/>
+            <c:size val="5"/>
+            <c:spPr>
+              <a:solidFill>
+                <a:schemeClr val="accent4"/>
+              </a:solidFill>
+              <a:ln w="9525">
+                <a:solidFill>
+                  <a:schemeClr val="accent4"/>
+                </a:solidFill>
+              </a:ln>
+              <a:effectLst/>
+            </c:spPr>
+          </c:marker>
+          <c:errBars>
+            <c:errDir val="y"/>
+            <c:errBarType val="both"/>
+            <c:errValType val="cust"/>
+            <c:noEndCap val="0"/>
+            <c:plus>
+              <c:numRef>
+                <c:f>'Race Ethnicity'!$R$114:$V$114</c:f>
+                <c:numCache>
+                  <c:formatCode>General</c:formatCode>
+                  <c:ptCount val="5"/>
+                  <c:pt idx="0">
+                    <c:v>2.2275339999999991E-2</c:v>
+                  </c:pt>
+                  <c:pt idx="1">
+                    <c:v>3.1785690000000005E-2</c:v>
+                  </c:pt>
+                  <c:pt idx="2">
+                    <c:v>2.5619719999999985E-2</c:v>
+                  </c:pt>
+                  <c:pt idx="3">
+                    <c:v>2.1431929999999988E-2</c:v>
+                  </c:pt>
+                  <c:pt idx="4">
+                    <c:v>5.5004120000000017E-2</c:v>
+                  </c:pt>
+                </c:numCache>
+              </c:numRef>
+            </c:plus>
+            <c:minus>
+              <c:numRef>
+                <c:f>'Race Ethnicity'!$R$105:$V$105</c:f>
+                <c:numCache>
+                  <c:formatCode>General</c:formatCode>
+                  <c:ptCount val="5"/>
+                  <c:pt idx="0">
+                    <c:v>2.2274510000000011E-2</c:v>
+                  </c:pt>
+                  <c:pt idx="1">
+                    <c:v>3.1785400000000005E-2</c:v>
+                  </c:pt>
+                  <c:pt idx="2">
+                    <c:v>2.5619450000000016E-2</c:v>
+                  </c:pt>
+                  <c:pt idx="3">
+                    <c:v>2.1431690000000003E-2</c:v>
+                  </c:pt>
+                  <c:pt idx="4">
+                    <c:v>5.5004019999999987E-2</c:v>
+                  </c:pt>
+                </c:numCache>
+              </c:numRef>
+            </c:minus>
+            <c:spPr>
+              <a:noFill/>
+              <a:ln w="9525" cap="flat" cmpd="sng" algn="ctr">
+                <a:solidFill>
+                  <a:schemeClr val="tx1">
+                    <a:lumMod val="65000"/>
+                    <a:lumOff val="35000"/>
+                  </a:schemeClr>
+                </a:solidFill>
+                <a:round/>
+              </a:ln>
+              <a:effectLst/>
+            </c:spPr>
+          </c:errBars>
+          <c:cat>
+            <c:strRef>
+              <c:f>'Race Ethnicity'!$L$101:$P$101</c:f>
+              <c:strCache>
+                <c:ptCount val="5"/>
+                <c:pt idx="0">
+                  <c:v>2001-2004</c:v>
+                </c:pt>
+                <c:pt idx="1">
+                  <c:v>2005-2008</c:v>
+                </c:pt>
+                <c:pt idx="2">
+                  <c:v>2009-2012</c:v>
+                </c:pt>
+                <c:pt idx="3">
+                  <c:v>2013-2016</c:v>
+                </c:pt>
+                <c:pt idx="4">
+                  <c:v>2017-2020</c:v>
+                </c:pt>
+              </c:strCache>
+            </c:strRef>
+          </c:cat>
+          <c:val>
+            <c:numRef>
+              <c:f>'Race Ethnicity'!$L$105:$P$105</c:f>
+              <c:numCache>
+                <c:formatCode>General</c:formatCode>
+                <c:ptCount val="5"/>
+                <c:pt idx="0">
+                  <c:v>9.6004000000000006E-2</c:v>
+                </c:pt>
+                <c:pt idx="1">
+                  <c:v>0.12728300000000001</c:v>
+                </c:pt>
+                <c:pt idx="2">
+                  <c:v>0.15751200000000001</c:v>
+                </c:pt>
+                <c:pt idx="3">
+                  <c:v>0.12653</c:v>
+                </c:pt>
+                <c:pt idx="4">
+                  <c:v>0.13664499999999999</c:v>
+                </c:pt>
+              </c:numCache>
+            </c:numRef>
+          </c:val>
+          <c:smooth val="0"/>
+          <c:extLst>
+            <c:ext xmlns:c16="http://schemas.microsoft.com/office/drawing/2014/chart" uri="{C3380CC4-5D6E-409C-BE32-E72D297353CC}">
+              <c16:uniqueId val="{00000003-D9EC-4BA7-B02B-6C24F1F33040}"/>
+            </c:ext>
+          </c:extLst>
+        </c:ser>
+        <c:ser>
+          <c:idx val="1"/>
+          <c:order val="1"/>
+          <c:tx>
+            <c:strRef>
+              <c:f>'Race Ethnicity'!$K$103</c:f>
+              <c:strCache>
+                <c:ptCount val="1"/>
+                <c:pt idx="0">
+                  <c:v>Non-Hispanic Black</c:v>
+                </c:pt>
+              </c:strCache>
+            </c:strRef>
+          </c:tx>
+          <c:spPr>
+            <a:ln w="44450" cap="rnd">
+              <a:solidFill>
+                <a:schemeClr val="accent2"/>
+              </a:solidFill>
+              <a:round/>
+            </a:ln>
+            <a:effectLst/>
+          </c:spPr>
+          <c:marker>
+            <c:symbol val="circle"/>
+            <c:size val="5"/>
+            <c:spPr>
+              <a:solidFill>
+                <a:schemeClr val="accent2"/>
+              </a:solidFill>
+              <a:ln w="9525">
+                <a:solidFill>
+                  <a:schemeClr val="accent2"/>
+                </a:solidFill>
+              </a:ln>
+              <a:effectLst/>
+            </c:spPr>
+          </c:marker>
+          <c:errBars>
+            <c:errDir val="y"/>
+            <c:errBarType val="both"/>
+            <c:errValType val="cust"/>
+            <c:noEndCap val="0"/>
+            <c:plus>
+              <c:numRef>
+                <c:f>'Race Ethnicity'!$R$112:$V$112</c:f>
+                <c:numCache>
+                  <c:formatCode>General</c:formatCode>
+                  <c:ptCount val="5"/>
+                  <c:pt idx="0">
+                    <c:v>5.2622940000000007E-2</c:v>
+                  </c:pt>
+                  <c:pt idx="1">
+                    <c:v>5.1591759999999987E-2</c:v>
+                  </c:pt>
+                  <c:pt idx="2">
+                    <c:v>3.9515870000000008E-2</c:v>
+                  </c:pt>
+                  <c:pt idx="3">
+                    <c:v>4.0794500000000011E-2</c:v>
+                  </c:pt>
+                  <c:pt idx="4">
+                    <c:v>4.9699409999999999E-2</c:v>
+                  </c:pt>
+                </c:numCache>
+              </c:numRef>
+            </c:plus>
+            <c:minus>
+              <c:numRef>
+                <c:f>'Race Ethnicity'!$R$103:$V$103</c:f>
+                <c:numCache>
+                  <c:formatCode>General</c:formatCode>
+                  <c:ptCount val="5"/>
+                  <c:pt idx="0">
+                    <c:v>5.2623549999999991E-2</c:v>
+                  </c:pt>
+                  <c:pt idx="1">
+                    <c:v>5.1592520000000003E-2</c:v>
+                  </c:pt>
+                  <c:pt idx="2">
+                    <c:v>3.9516559999999978E-2</c:v>
+                  </c:pt>
+                  <c:pt idx="3">
+                    <c:v>4.0793970000000013E-2</c:v>
+                  </c:pt>
+                  <c:pt idx="4">
+                    <c:v>4.969916000000002E-2</c:v>
+                  </c:pt>
+                </c:numCache>
+              </c:numRef>
+            </c:minus>
+            <c:spPr>
+              <a:noFill/>
+              <a:ln w="9525" cap="flat" cmpd="sng" algn="ctr">
+                <a:solidFill>
+                  <a:schemeClr val="tx1">
+                    <a:lumMod val="65000"/>
+                    <a:lumOff val="35000"/>
+                  </a:schemeClr>
+                </a:solidFill>
+                <a:round/>
+              </a:ln>
+              <a:effectLst/>
+            </c:spPr>
+          </c:errBars>
+          <c:cat>
+            <c:strRef>
+              <c:f>'Race Ethnicity'!$L$101:$P$101</c:f>
+              <c:strCache>
+                <c:ptCount val="5"/>
+                <c:pt idx="0">
+                  <c:v>2001-2004</c:v>
+                </c:pt>
+                <c:pt idx="1">
+                  <c:v>2005-2008</c:v>
+                </c:pt>
+                <c:pt idx="2">
+                  <c:v>2009-2012</c:v>
+                </c:pt>
+                <c:pt idx="3">
+                  <c:v>2013-2016</c:v>
+                </c:pt>
+                <c:pt idx="4">
+                  <c:v>2017-2020</c:v>
+                </c:pt>
+              </c:strCache>
+            </c:strRef>
+          </c:cat>
+          <c:val>
+            <c:numRef>
+              <c:f>'Race Ethnicity'!$L$103:$P$103</c:f>
+              <c:numCache>
+                <c:formatCode>General</c:formatCode>
+                <c:ptCount val="5"/>
+                <c:pt idx="0">
+                  <c:v>0.273756</c:v>
+                </c:pt>
+                <c:pt idx="1">
+                  <c:v>0.28798899999999999</c:v>
+                </c:pt>
+                <c:pt idx="2">
+                  <c:v>0.30109399999999997</c:v>
+                </c:pt>
+                <c:pt idx="3">
+                  <c:v>0.32947199999999999</c:v>
+                </c:pt>
+                <c:pt idx="4">
+                  <c:v>0.32705800000000002</c:v>
+                </c:pt>
+              </c:numCache>
+            </c:numRef>
+          </c:val>
+          <c:smooth val="0"/>
+          <c:extLst>
+            <c:ext xmlns:c16="http://schemas.microsoft.com/office/drawing/2014/chart" uri="{C3380CC4-5D6E-409C-BE32-E72D297353CC}">
+              <c16:uniqueId val="{00000001-D9EC-4BA7-B02B-6C24F1F33040}"/>
+            </c:ext>
+          </c:extLst>
+        </c:ser>
+        <c:ser>
           <c:idx val="0"/>
-          <c:order val="0"/>
+          <c:order val="2"/>
           <c:tx>
             <c:strRef>
               <c:f>'Race Ethnicity'!$K$102</c:f>
@@ -3147,174 +3483,15 @@
           </c:extLst>
         </c:ser>
         <c:ser>
-          <c:idx val="1"/>
-          <c:order val="1"/>
-          <c:tx>
-            <c:strRef>
-              <c:f>'Race Ethnicity'!$K$103</c:f>
-              <c:strCache>
-                <c:ptCount val="1"/>
-                <c:pt idx="0">
-                  <c:v>NH Black</c:v>
-                </c:pt>
-              </c:strCache>
-            </c:strRef>
-          </c:tx>
-          <c:spPr>
-            <a:ln w="44450" cap="rnd">
-              <a:solidFill>
-                <a:schemeClr val="accent2"/>
-              </a:solidFill>
-              <a:round/>
-            </a:ln>
-            <a:effectLst/>
-          </c:spPr>
-          <c:marker>
-            <c:symbol val="circle"/>
-            <c:size val="5"/>
-            <c:spPr>
-              <a:solidFill>
-                <a:schemeClr val="accent2"/>
-              </a:solidFill>
-              <a:ln w="9525">
-                <a:solidFill>
-                  <a:schemeClr val="accent2"/>
-                </a:solidFill>
-              </a:ln>
-              <a:effectLst/>
-            </c:spPr>
-          </c:marker>
-          <c:errBars>
-            <c:errDir val="y"/>
-            <c:errBarType val="both"/>
-            <c:errValType val="cust"/>
-            <c:noEndCap val="0"/>
-            <c:plus>
-              <c:numRef>
-                <c:f>'Race Ethnicity'!$R$112:$V$112</c:f>
-                <c:numCache>
-                  <c:formatCode>General</c:formatCode>
-                  <c:ptCount val="5"/>
-                  <c:pt idx="0">
-                    <c:v>5.2622940000000007E-2</c:v>
-                  </c:pt>
-                  <c:pt idx="1">
-                    <c:v>5.1591759999999987E-2</c:v>
-                  </c:pt>
-                  <c:pt idx="2">
-                    <c:v>3.9515870000000008E-2</c:v>
-                  </c:pt>
-                  <c:pt idx="3">
-                    <c:v>4.0794500000000011E-2</c:v>
-                  </c:pt>
-                  <c:pt idx="4">
-                    <c:v>4.9699409999999999E-2</c:v>
-                  </c:pt>
-                </c:numCache>
-              </c:numRef>
-            </c:plus>
-            <c:minus>
-              <c:numRef>
-                <c:f>'Race Ethnicity'!$R$103:$V$103</c:f>
-                <c:numCache>
-                  <c:formatCode>General</c:formatCode>
-                  <c:ptCount val="5"/>
-                  <c:pt idx="0">
-                    <c:v>5.2623549999999991E-2</c:v>
-                  </c:pt>
-                  <c:pt idx="1">
-                    <c:v>5.1592520000000003E-2</c:v>
-                  </c:pt>
-                  <c:pt idx="2">
-                    <c:v>3.9516559999999978E-2</c:v>
-                  </c:pt>
-                  <c:pt idx="3">
-                    <c:v>4.0793970000000013E-2</c:v>
-                  </c:pt>
-                  <c:pt idx="4">
-                    <c:v>4.969916000000002E-2</c:v>
-                  </c:pt>
-                </c:numCache>
-              </c:numRef>
-            </c:minus>
-            <c:spPr>
-              <a:noFill/>
-              <a:ln w="9525" cap="flat" cmpd="sng" algn="ctr">
-                <a:solidFill>
-                  <a:schemeClr val="tx1">
-                    <a:lumMod val="65000"/>
-                    <a:lumOff val="35000"/>
-                  </a:schemeClr>
-                </a:solidFill>
-                <a:round/>
-              </a:ln>
-              <a:effectLst/>
-            </c:spPr>
-          </c:errBars>
-          <c:cat>
-            <c:strRef>
-              <c:f>'Race Ethnicity'!$L$101:$P$101</c:f>
-              <c:strCache>
-                <c:ptCount val="5"/>
-                <c:pt idx="0">
-                  <c:v>2001-2004</c:v>
-                </c:pt>
-                <c:pt idx="1">
-                  <c:v>2005-2008</c:v>
-                </c:pt>
-                <c:pt idx="2">
-                  <c:v>2009-2012</c:v>
-                </c:pt>
-                <c:pt idx="3">
-                  <c:v>2013-2016</c:v>
-                </c:pt>
-                <c:pt idx="4">
-                  <c:v>2017-2020</c:v>
-                </c:pt>
-              </c:strCache>
-            </c:strRef>
-          </c:cat>
-          <c:val>
-            <c:numRef>
-              <c:f>'Race Ethnicity'!$L$103:$P$103</c:f>
-              <c:numCache>
-                <c:formatCode>General</c:formatCode>
-                <c:ptCount val="5"/>
-                <c:pt idx="0">
-                  <c:v>0.273756</c:v>
-                </c:pt>
-                <c:pt idx="1">
-                  <c:v>0.28798899999999999</c:v>
-                </c:pt>
-                <c:pt idx="2">
-                  <c:v>0.30109399999999997</c:v>
-                </c:pt>
-                <c:pt idx="3">
-                  <c:v>0.32947199999999999</c:v>
-                </c:pt>
-                <c:pt idx="4">
-                  <c:v>0.32705800000000002</c:v>
-                </c:pt>
-              </c:numCache>
-            </c:numRef>
-          </c:val>
-          <c:smooth val="0"/>
-          <c:extLst>
-            <c:ext xmlns:c16="http://schemas.microsoft.com/office/drawing/2014/chart" uri="{C3380CC4-5D6E-409C-BE32-E72D297353CC}">
-              <c16:uniqueId val="{00000001-D9EC-4BA7-B02B-6C24F1F33040}"/>
-            </c:ext>
-          </c:extLst>
-        </c:ser>
-        <c:ser>
           <c:idx val="2"/>
-          <c:order val="2"/>
+          <c:order val="3"/>
           <c:tx>
             <c:strRef>
               <c:f>'Race Ethnicity'!$K$104</c:f>
               <c:strCache>
                 <c:ptCount val="1"/>
                 <c:pt idx="0">
-                  <c:v>NH Other</c:v>
+                  <c:v>Other</c:v>
                 </c:pt>
               </c:strCache>
             </c:strRef>
@@ -3458,165 +3635,6 @@
           <c:extLst>
             <c:ext xmlns:c16="http://schemas.microsoft.com/office/drawing/2014/chart" uri="{C3380CC4-5D6E-409C-BE32-E72D297353CC}">
               <c16:uniqueId val="{00000002-D9EC-4BA7-B02B-6C24F1F33040}"/>
-            </c:ext>
-          </c:extLst>
-        </c:ser>
-        <c:ser>
-          <c:idx val="3"/>
-          <c:order val="3"/>
-          <c:tx>
-            <c:strRef>
-              <c:f>'Race Ethnicity'!$K$105</c:f>
-              <c:strCache>
-                <c:ptCount val="1"/>
-                <c:pt idx="0">
-                  <c:v>NH White</c:v>
-                </c:pt>
-              </c:strCache>
-            </c:strRef>
-          </c:tx>
-          <c:spPr>
-            <a:ln w="44450" cap="rnd">
-              <a:solidFill>
-                <a:schemeClr val="accent4"/>
-              </a:solidFill>
-              <a:round/>
-            </a:ln>
-            <a:effectLst/>
-          </c:spPr>
-          <c:marker>
-            <c:symbol val="circle"/>
-            <c:size val="5"/>
-            <c:spPr>
-              <a:solidFill>
-                <a:schemeClr val="accent4"/>
-              </a:solidFill>
-              <a:ln w="9525">
-                <a:solidFill>
-                  <a:schemeClr val="accent4"/>
-                </a:solidFill>
-              </a:ln>
-              <a:effectLst/>
-            </c:spPr>
-          </c:marker>
-          <c:errBars>
-            <c:errDir val="y"/>
-            <c:errBarType val="both"/>
-            <c:errValType val="cust"/>
-            <c:noEndCap val="0"/>
-            <c:plus>
-              <c:numRef>
-                <c:f>'Race Ethnicity'!$R$114:$V$114</c:f>
-                <c:numCache>
-                  <c:formatCode>General</c:formatCode>
-                  <c:ptCount val="5"/>
-                  <c:pt idx="0">
-                    <c:v>2.2275339999999991E-2</c:v>
-                  </c:pt>
-                  <c:pt idx="1">
-                    <c:v>3.1785690000000005E-2</c:v>
-                  </c:pt>
-                  <c:pt idx="2">
-                    <c:v>2.5619719999999985E-2</c:v>
-                  </c:pt>
-                  <c:pt idx="3">
-                    <c:v>2.1431929999999988E-2</c:v>
-                  </c:pt>
-                  <c:pt idx="4">
-                    <c:v>5.5004120000000017E-2</c:v>
-                  </c:pt>
-                </c:numCache>
-              </c:numRef>
-            </c:plus>
-            <c:minus>
-              <c:numRef>
-                <c:f>'Race Ethnicity'!$R$105:$V$105</c:f>
-                <c:numCache>
-                  <c:formatCode>General</c:formatCode>
-                  <c:ptCount val="5"/>
-                  <c:pt idx="0">
-                    <c:v>2.2274510000000011E-2</c:v>
-                  </c:pt>
-                  <c:pt idx="1">
-                    <c:v>3.1785400000000005E-2</c:v>
-                  </c:pt>
-                  <c:pt idx="2">
-                    <c:v>2.5619450000000016E-2</c:v>
-                  </c:pt>
-                  <c:pt idx="3">
-                    <c:v>2.1431690000000003E-2</c:v>
-                  </c:pt>
-                  <c:pt idx="4">
-                    <c:v>5.5004019999999987E-2</c:v>
-                  </c:pt>
-                </c:numCache>
-              </c:numRef>
-            </c:minus>
-            <c:spPr>
-              <a:noFill/>
-              <a:ln w="9525" cap="flat" cmpd="sng" algn="ctr">
-                <a:solidFill>
-                  <a:schemeClr val="tx1">
-                    <a:lumMod val="65000"/>
-                    <a:lumOff val="35000"/>
-                  </a:schemeClr>
-                </a:solidFill>
-                <a:round/>
-              </a:ln>
-              <a:effectLst/>
-            </c:spPr>
-          </c:errBars>
-          <c:cat>
-            <c:strRef>
-              <c:f>'Race Ethnicity'!$L$101:$P$101</c:f>
-              <c:strCache>
-                <c:ptCount val="5"/>
-                <c:pt idx="0">
-                  <c:v>2001-2004</c:v>
-                </c:pt>
-                <c:pt idx="1">
-                  <c:v>2005-2008</c:v>
-                </c:pt>
-                <c:pt idx="2">
-                  <c:v>2009-2012</c:v>
-                </c:pt>
-                <c:pt idx="3">
-                  <c:v>2013-2016</c:v>
-                </c:pt>
-                <c:pt idx="4">
-                  <c:v>2017-2020</c:v>
-                </c:pt>
-              </c:strCache>
-            </c:strRef>
-          </c:cat>
-          <c:val>
-            <c:numRef>
-              <c:f>'Race Ethnicity'!$L$105:$P$105</c:f>
-              <c:numCache>
-                <c:formatCode>General</c:formatCode>
-                <c:ptCount val="5"/>
-                <c:pt idx="0">
-                  <c:v>9.6004000000000006E-2</c:v>
-                </c:pt>
-                <c:pt idx="1">
-                  <c:v>0.12728300000000001</c:v>
-                </c:pt>
-                <c:pt idx="2">
-                  <c:v>0.15751200000000001</c:v>
-                </c:pt>
-                <c:pt idx="3">
-                  <c:v>0.12653</c:v>
-                </c:pt>
-                <c:pt idx="4">
-                  <c:v>0.13664499999999999</c:v>
-                </c:pt>
-              </c:numCache>
-            </c:numRef>
-          </c:val>
-          <c:smooth val="0"/>
-          <c:extLst>
-            <c:ext xmlns:c16="http://schemas.microsoft.com/office/drawing/2014/chart" uri="{C3380CC4-5D6E-409C-BE32-E72D297353CC}">
-              <c16:uniqueId val="{00000003-D9EC-4BA7-B02B-6C24F1F33040}"/>
             </c:ext>
           </c:extLst>
         </c:ser>
@@ -3720,9 +3738,14 @@
                   </a:defRPr>
                 </a:pPr>
                 <a:r>
-                  <a:rPr lang="en-US"/>
-                  <a:t>% Anemia</a:t>
+                  <a:rPr lang="en-US" sz="2000" b="0" i="0" baseline="0" dirty="0">
+                    <a:effectLst/>
+                  </a:rPr>
+                  <a:t>Anemia among adults with CKD  (%) </a:t>
                 </a:r>
+                <a:endParaRPr lang="en-US" sz="2800" dirty="0">
+                  <a:effectLst/>
+                </a:endParaRPr>
               </a:p>
             </c:rich>
           </c:tx>
@@ -6937,7 +6960,7 @@
           <a:p>
             <a:fld id="{81638023-F60A-4B21-BA4E-BD9AA67C04CD}" type="datetimeFigureOut">
               <a:rPr lang="en-US" smtClean="0"/>
-              <a:t>9/23/2025</a:t>
+              <a:t>1/16/2026</a:t>
             </a:fld>
             <a:endParaRPr lang="en-US"/>
           </a:p>
@@ -7145,7 +7168,7 @@
           <a:p>
             <a:fld id="{81638023-F60A-4B21-BA4E-BD9AA67C04CD}" type="datetimeFigureOut">
               <a:rPr lang="en-US" smtClean="0"/>
-              <a:t>9/23/2025</a:t>
+              <a:t>1/16/2026</a:t>
             </a:fld>
             <a:endParaRPr lang="en-US"/>
           </a:p>
@@ -7354,7 +7377,7 @@
           <a:p>
             <a:fld id="{81638023-F60A-4B21-BA4E-BD9AA67C04CD}" type="datetimeFigureOut">
               <a:rPr lang="en-US" smtClean="0"/>
-              <a:t>9/23/2025</a:t>
+              <a:t>1/16/2026</a:t>
             </a:fld>
             <a:endParaRPr lang="en-US"/>
           </a:p>
@@ -7669,7 +7692,7 @@
           <a:p>
             <a:fld id="{81638023-F60A-4B21-BA4E-BD9AA67C04CD}" type="datetimeFigureOut">
               <a:rPr lang="en-US" smtClean="0"/>
-              <a:t>9/23/2025</a:t>
+              <a:t>1/16/2026</a:t>
             </a:fld>
             <a:endParaRPr lang="en-US"/>
           </a:p>
@@ -7975,7 +7998,7 @@
           <a:p>
             <a:fld id="{81638023-F60A-4B21-BA4E-BD9AA67C04CD}" type="datetimeFigureOut">
               <a:rPr lang="en-US" smtClean="0"/>
-              <a:t>9/23/2025</a:t>
+              <a:t>1/16/2026</a:t>
             </a:fld>
             <a:endParaRPr lang="en-US"/>
           </a:p>
@@ -8423,7 +8446,7 @@
           <a:p>
             <a:fld id="{81638023-F60A-4B21-BA4E-BD9AA67C04CD}" type="datetimeFigureOut">
               <a:rPr lang="en-US" smtClean="0"/>
-              <a:t>9/23/2025</a:t>
+              <a:t>1/16/2026</a:t>
             </a:fld>
             <a:endParaRPr lang="en-US"/>
           </a:p>
@@ -8605,7 +8628,7 @@
           <a:p>
             <a:fld id="{81638023-F60A-4B21-BA4E-BD9AA67C04CD}" type="datetimeFigureOut">
               <a:rPr lang="en-US" smtClean="0"/>
-              <a:t>9/23/2025</a:t>
+              <a:t>1/16/2026</a:t>
             </a:fld>
             <a:endParaRPr lang="en-US"/>
           </a:p>
@@ -8754,7 +8777,7 @@
           <a:p>
             <a:fld id="{81638023-F60A-4B21-BA4E-BD9AA67C04CD}" type="datetimeFigureOut">
               <a:rPr lang="en-US" smtClean="0"/>
-              <a:t>9/23/2025</a:t>
+              <a:t>1/16/2026</a:t>
             </a:fld>
             <a:endParaRPr lang="en-US"/>
           </a:p>
@@ -9102,7 +9125,7 @@
           <a:p>
             <a:fld id="{81638023-F60A-4B21-BA4E-BD9AA67C04CD}" type="datetimeFigureOut">
               <a:rPr lang="en-US" smtClean="0"/>
-              <a:t>9/23/2025</a:t>
+              <a:t>1/16/2026</a:t>
             </a:fld>
             <a:endParaRPr lang="en-US"/>
           </a:p>
@@ -9430,7 +9453,7 @@
           <a:p>
             <a:fld id="{81638023-F60A-4B21-BA4E-BD9AA67C04CD}" type="datetimeFigureOut">
               <a:rPr lang="en-US" smtClean="0"/>
-              <a:t>9/23/2025</a:t>
+              <a:t>1/16/2026</a:t>
             </a:fld>
             <a:endParaRPr lang="en-US"/>
           </a:p>
@@ -9708,7 +9731,7 @@
           <a:p>
             <a:fld id="{81638023-F60A-4B21-BA4E-BD9AA67C04CD}" type="datetimeFigureOut">
               <a:rPr lang="en-US" smtClean="0"/>
-              <a:t>9/23/2025</a:t>
+              <a:t>1/16/2026</a:t>
             </a:fld>
             <a:endParaRPr lang="en-US"/>
           </a:p>
@@ -10176,7 +10199,7 @@
         <p:spPr>
           <a:xfrm>
             <a:off x="324666" y="3879167"/>
-            <a:ext cx="11542644" cy="2031325"/>
+            <a:ext cx="11542644" cy="2062103"/>
           </a:xfrm>
           <a:prstGeom prst="rect">
             <a:avLst/>
@@ -10191,23 +10214,25 @@
           <a:p>
             <a:pPr algn="l"/>
             <a:r>
-              <a:rPr lang="en-US" sz="1800" dirty="0">
+              <a:rPr lang="en-US" dirty="0">
                 <a:effectLst/>
                 <a:latin typeface="Open Sans" panose="020B0606030504020204" pitchFamily="34" charset="0"/>
                 <a:ea typeface="Open Sans" panose="020B0606030504020204" pitchFamily="34" charset="0"/>
                 <a:cs typeface="Open Sans" panose="020B0606030504020204" pitchFamily="34" charset="0"/>
               </a:rPr>
-              <a:t>During 2001–March 2020, the overall crude prevalence of anemia increased from 4.9% to 7.1%. Anemia prevalence was 3-fold higher among adults with CKD than those without CKD (16.4% vs. 5.6%). Prevalence of anemia among adults with CKD was higher with older age, among females, and Non-Hispanic Black adults.</a:t>
+              <a:t>During 2001–March 2020, the overall crude prevalence of anemia increased from 4.9% to 7.1%. Anemia prevalence was at least 2.6 times higher among adults with CKD compared to adults without CKD across the time periods. Crude prevalence of anemia among adults with CKD was higher among older, female (except 2013-2016), and non-Hispanic Black adults.</a:t>
             </a:r>
           </a:p>
           <a:p>
             <a:pPr algn="l"/>
-            <a:endParaRPr lang="en-US" b="1" dirty="0">
+            <a:endParaRPr lang="en-US" sz="2000" b="1" dirty="0">
               <a:solidFill>
                 <a:srgbClr val="000000"/>
               </a:solidFill>
               <a:effectLst/>
               <a:latin typeface="Open Sans" panose="020B0606030504020204" pitchFamily="34" charset="0"/>
+              <a:ea typeface="Open Sans" panose="020B0606030504020204" pitchFamily="34" charset="0"/>
+              <a:cs typeface="Open Sans" panose="020B0606030504020204" pitchFamily="34" charset="0"/>
             </a:endParaRPr>
           </a:p>
           <a:p>
@@ -10342,8 +10367,8 @@
           <a:lstStyle/>
           <a:p>
             <a:r>
-              <a:rPr lang="en-US" b="1"/>
-              <a:t>Crude Trends in Prevalence of Anemia, by CKD</a:t>
+              <a:rPr lang="en-US" b="1" dirty="0"/>
+              <a:t>Trends in Prevalence of Anemia by CKD, Crude </a:t>
             </a:r>
           </a:p>
         </p:txBody>
@@ -10360,7 +10385,13 @@
           <p:cNvGraphicFramePr>
             <a:graphicFrameLocks/>
           </p:cNvGraphicFramePr>
-          <p:nvPr/>
+          <p:nvPr>
+            <p:extLst>
+              <p:ext uri="{D42A27DB-BD31-4B8C-83A1-F6EECF244321}">
+                <p14:modId xmlns:p14="http://schemas.microsoft.com/office/powerpoint/2010/main" val="2617736958"/>
+              </p:ext>
+            </p:extLst>
+          </p:nvPr>
         </p:nvGraphicFramePr>
         <p:xfrm>
           <a:off x="381000" y="1690688"/>
@@ -10426,8 +10457,15 @@
           <a:lstStyle/>
           <a:p>
             <a:r>
-              <a:rPr lang="en-US" b="1"/>
-              <a:t>Age-Standardized Trends in Prevalence of Anemia, by CKD</a:t>
+              <a:rPr lang="en-US" b="1" dirty="0"/>
+              <a:t>Trends in Prevalence of Anemia by CKD, </a:t>
+            </a:r>
+            <a:br>
+              <a:rPr lang="en-US" b="1" dirty="0"/>
+            </a:br>
+            <a:r>
+              <a:rPr lang="en-US" b="1" dirty="0"/>
+              <a:t>Age-Standardized </a:t>
             </a:r>
           </a:p>
         </p:txBody>
@@ -10444,7 +10482,13 @@
           <p:cNvGraphicFramePr>
             <a:graphicFrameLocks/>
           </p:cNvGraphicFramePr>
-          <p:nvPr/>
+          <p:nvPr>
+            <p:extLst>
+              <p:ext uri="{D42A27DB-BD31-4B8C-83A1-F6EECF244321}">
+                <p14:modId xmlns:p14="http://schemas.microsoft.com/office/powerpoint/2010/main" val="2540389386"/>
+              </p:ext>
+            </p:extLst>
+          </p:nvPr>
         </p:nvGraphicFramePr>
         <p:xfrm>
           <a:off x="381000" y="1690688"/>
@@ -10510,8 +10554,8 @@
           <a:lstStyle/>
           <a:p>
             <a:r>
-              <a:rPr lang="en-US" b="1"/>
-              <a:t>Crude Trends in Prevalence of Anemia in Adults with CKD, by Age</a:t>
+              <a:rPr lang="en-US" b="1" dirty="0"/>
+              <a:t>Trends in Prevalence of Anemia in Adults with CKD by Age, Crude</a:t>
             </a:r>
           </a:p>
         </p:txBody>
@@ -10528,7 +10572,13 @@
           <p:cNvGraphicFramePr>
             <a:graphicFrameLocks/>
           </p:cNvGraphicFramePr>
-          <p:nvPr/>
+          <p:nvPr>
+            <p:extLst>
+              <p:ext uri="{D42A27DB-BD31-4B8C-83A1-F6EECF244321}">
+                <p14:modId xmlns:p14="http://schemas.microsoft.com/office/powerpoint/2010/main" val="725846217"/>
+              </p:ext>
+            </p:extLst>
+          </p:nvPr>
         </p:nvGraphicFramePr>
         <p:xfrm>
           <a:off x="381000" y="1690688"/>
@@ -10594,15 +10644,15 @@
           <a:lstStyle/>
           <a:p>
             <a:r>
-              <a:rPr lang="en-US" sz="4100" b="1"/>
-              <a:t>Crude Trends in Prevalence of Anemia in Adults </a:t>
+              <a:rPr lang="en-US" b="1" dirty="0"/>
+              <a:t>Trends in Prevalence of Anemia in Adults </a:t>
             </a:r>
             <a:br>
-              <a:rPr lang="en-US" sz="4100" b="1"/>
+              <a:rPr lang="en-US" b="1" dirty="0"/>
             </a:br>
             <a:r>
-              <a:rPr lang="en-US" sz="4100" b="1"/>
-              <a:t>with CKD, by Sex</a:t>
+              <a:rPr lang="en-US" b="1" dirty="0"/>
+              <a:t>with CKD by Sex, Crude</a:t>
             </a:r>
           </a:p>
         </p:txBody>
@@ -10619,7 +10669,13 @@
           <p:cNvGraphicFramePr>
             <a:graphicFrameLocks/>
           </p:cNvGraphicFramePr>
-          <p:nvPr/>
+          <p:nvPr>
+            <p:extLst>
+              <p:ext uri="{D42A27DB-BD31-4B8C-83A1-F6EECF244321}">
+                <p14:modId xmlns:p14="http://schemas.microsoft.com/office/powerpoint/2010/main" val="2377798531"/>
+              </p:ext>
+            </p:extLst>
+          </p:nvPr>
         </p:nvGraphicFramePr>
         <p:xfrm>
           <a:off x="381000" y="1690688"/>
@@ -10685,8 +10741,8 @@
           <a:lstStyle/>
           <a:p>
             <a:r>
-              <a:rPr lang="en-US" b="1"/>
-              <a:t>Crude Trends in Prevalence of Anemia Disease in Adults with CKD, by Race/Ethnicity</a:t>
+              <a:rPr lang="en-US" b="1" dirty="0"/>
+              <a:t>Trends in Prevalence of Anemia in Adults with CKD by Race/Ethnicity, Crude</a:t>
             </a:r>
           </a:p>
         </p:txBody>
@@ -10703,7 +10759,13 @@
           <p:cNvGraphicFramePr>
             <a:graphicFrameLocks/>
           </p:cNvGraphicFramePr>
-          <p:nvPr/>
+          <p:nvPr>
+            <p:extLst>
+              <p:ext uri="{D42A27DB-BD31-4B8C-83A1-F6EECF244321}">
+                <p14:modId xmlns:p14="http://schemas.microsoft.com/office/powerpoint/2010/main" val="523161545"/>
+              </p:ext>
+            </p:extLst>
+          </p:nvPr>
         </p:nvGraphicFramePr>
         <p:xfrm>
           <a:off x="381000" y="1690688"/>

--- a/CKDSurveillance/PPT/Q808.pptx
+++ b/CKDSurveillance/PPT/Q808.pptx
@@ -6960,7 +6960,7 @@
           <a:p>
             <a:fld id="{81638023-F60A-4B21-BA4E-BD9AA67C04CD}" type="datetimeFigureOut">
               <a:rPr lang="en-US" smtClean="0"/>
-              <a:t>1/16/2026</a:t>
+              <a:t>2/26/2026</a:t>
             </a:fld>
             <a:endParaRPr lang="en-US"/>
           </a:p>
@@ -7168,7 +7168,7 @@
           <a:p>
             <a:fld id="{81638023-F60A-4B21-BA4E-BD9AA67C04CD}" type="datetimeFigureOut">
               <a:rPr lang="en-US" smtClean="0"/>
-              <a:t>1/16/2026</a:t>
+              <a:t>2/26/2026</a:t>
             </a:fld>
             <a:endParaRPr lang="en-US"/>
           </a:p>
@@ -7377,7 +7377,7 @@
           <a:p>
             <a:fld id="{81638023-F60A-4B21-BA4E-BD9AA67C04CD}" type="datetimeFigureOut">
               <a:rPr lang="en-US" smtClean="0"/>
-              <a:t>1/16/2026</a:t>
+              <a:t>2/26/2026</a:t>
             </a:fld>
             <a:endParaRPr lang="en-US"/>
           </a:p>
@@ -7692,7 +7692,7 @@
           <a:p>
             <a:fld id="{81638023-F60A-4B21-BA4E-BD9AA67C04CD}" type="datetimeFigureOut">
               <a:rPr lang="en-US" smtClean="0"/>
-              <a:t>1/16/2026</a:t>
+              <a:t>2/26/2026</a:t>
             </a:fld>
             <a:endParaRPr lang="en-US"/>
           </a:p>
@@ -7998,7 +7998,7 @@
           <a:p>
             <a:fld id="{81638023-F60A-4B21-BA4E-BD9AA67C04CD}" type="datetimeFigureOut">
               <a:rPr lang="en-US" smtClean="0"/>
-              <a:t>1/16/2026</a:t>
+              <a:t>2/26/2026</a:t>
             </a:fld>
             <a:endParaRPr lang="en-US"/>
           </a:p>
@@ -8446,7 +8446,7 @@
           <a:p>
             <a:fld id="{81638023-F60A-4B21-BA4E-BD9AA67C04CD}" type="datetimeFigureOut">
               <a:rPr lang="en-US" smtClean="0"/>
-              <a:t>1/16/2026</a:t>
+              <a:t>2/26/2026</a:t>
             </a:fld>
             <a:endParaRPr lang="en-US"/>
           </a:p>
@@ -8628,7 +8628,7 @@
           <a:p>
             <a:fld id="{81638023-F60A-4B21-BA4E-BD9AA67C04CD}" type="datetimeFigureOut">
               <a:rPr lang="en-US" smtClean="0"/>
-              <a:t>1/16/2026</a:t>
+              <a:t>2/26/2026</a:t>
             </a:fld>
             <a:endParaRPr lang="en-US"/>
           </a:p>
@@ -8777,7 +8777,7 @@
           <a:p>
             <a:fld id="{81638023-F60A-4B21-BA4E-BD9AA67C04CD}" type="datetimeFigureOut">
               <a:rPr lang="en-US" smtClean="0"/>
-              <a:t>1/16/2026</a:t>
+              <a:t>2/26/2026</a:t>
             </a:fld>
             <a:endParaRPr lang="en-US"/>
           </a:p>
@@ -9125,7 +9125,7 @@
           <a:p>
             <a:fld id="{81638023-F60A-4B21-BA4E-BD9AA67C04CD}" type="datetimeFigureOut">
               <a:rPr lang="en-US" smtClean="0"/>
-              <a:t>1/16/2026</a:t>
+              <a:t>2/26/2026</a:t>
             </a:fld>
             <a:endParaRPr lang="en-US"/>
           </a:p>
@@ -9453,7 +9453,7 @@
           <a:p>
             <a:fld id="{81638023-F60A-4B21-BA4E-BD9AA67C04CD}" type="datetimeFigureOut">
               <a:rPr lang="en-US" smtClean="0"/>
-              <a:t>1/16/2026</a:t>
+              <a:t>2/26/2026</a:t>
             </a:fld>
             <a:endParaRPr lang="en-US"/>
           </a:p>
@@ -9731,7 +9731,7 @@
           <a:p>
             <a:fld id="{81638023-F60A-4B21-BA4E-BD9AA67C04CD}" type="datetimeFigureOut">
               <a:rPr lang="en-US" smtClean="0"/>
-              <a:t>1/16/2026</a:t>
+              <a:t>2/26/2026</a:t>
             </a:fld>
             <a:endParaRPr lang="en-US"/>
           </a:p>
@@ -10175,7 +10175,11 @@
             </a:br>
             <a:r>
               <a:rPr lang="en-US" sz="4400" b="1" dirty="0"/>
-              <a:t>Trends in Prevalence of Anemia</a:t>
+              <a:t>Trends in Prevalence </a:t>
+            </a:r>
+            <a:r>
+              <a:rPr lang="en-US" sz="4400" b="1"/>
+              <a:t>of Anemia by CKD</a:t>
             </a:r>
             <a:br>
               <a:rPr lang="en-US" sz="4400" b="1" dirty="0"/>
@@ -10199,7 +10203,7 @@
         <p:spPr>
           <a:xfrm>
             <a:off x="324666" y="3879167"/>
-            <a:ext cx="11542644" cy="2062103"/>
+            <a:ext cx="11542644" cy="1785104"/>
           </a:xfrm>
           <a:prstGeom prst="rect">
             <a:avLst/>
@@ -10214,13 +10218,22 @@
           <a:p>
             <a:pPr algn="l"/>
             <a:r>
+              <a:rPr lang="en-US">
+                <a:effectLst/>
+                <a:latin typeface="Open Sans" panose="020B0606030504020204" pitchFamily="34" charset="0"/>
+                <a:ea typeface="Open Sans" panose="020B0606030504020204" pitchFamily="34" charset="0"/>
+                <a:cs typeface="Open Sans" panose="020B0606030504020204" pitchFamily="34" charset="0"/>
+              </a:rPr>
+              <a:t>Anemia </a:t>
+            </a:r>
+            <a:r>
               <a:rPr lang="en-US" dirty="0">
                 <a:effectLst/>
                 <a:latin typeface="Open Sans" panose="020B0606030504020204" pitchFamily="34" charset="0"/>
                 <a:ea typeface="Open Sans" panose="020B0606030504020204" pitchFamily="34" charset="0"/>
                 <a:cs typeface="Open Sans" panose="020B0606030504020204" pitchFamily="34" charset="0"/>
               </a:rPr>
-              <a:t>During 2001–March 2020, the overall crude prevalence of anemia increased from 4.9% to 7.1%. Anemia prevalence was at least 2.6 times higher among adults with CKD compared to adults without CKD across the time periods. Crude prevalence of anemia among adults with CKD was higher among older, female (except 2013-2016), and non-Hispanic Black adults.</a:t>
+              <a:t>prevalence was at least 2.6 times higher among adults with CKD compared to adults without CKD across the time periods. Crude prevalence of anemia among adults with CKD was higher among older, female (except 2013-2016), and non-Hispanic Black adults.</a:t>
             </a:r>
           </a:p>
           <a:p>
